--- a/deep_learning/fine_tuning/1-FineTuning.pptx
+++ b/deep_learning/fine_tuning/1-FineTuning.pptx
@@ -230,7 +230,7 @@
           <a:p>
             <a:fld id="{7BAEECA8-D063-486F-AE31-5020270C1449}" type="datetimeFigureOut">
               <a:rPr lang="en-US" smtClean="0"/>
-              <a:t>4/25/2026</a:t>
+              <a:t>6/10/2026</a:t>
             </a:fld>
             <a:endParaRPr lang="en-US"/>
           </a:p>
@@ -2479,7 +2479,7 @@
           <a:p>
             <a:fld id="{CB233BD1-3BA8-448D-9D08-7846095EA517}" type="datetimeFigureOut">
               <a:rPr lang="en-US" smtClean="0"/>
-              <a:t>4/25/2026</a:t>
+              <a:t>6/10/2026</a:t>
             </a:fld>
             <a:endParaRPr lang="en-US"/>
           </a:p>
@@ -2893,7 +2893,7 @@
           <a:p>
             <a:fld id="{6383FAE1-13DE-4511-8C1B-C8AFB720664C}" type="datetimeFigureOut">
               <a:rPr lang="en-US" smtClean="0"/>
-              <a:t>4/25/2026</a:t>
+              <a:t>6/10/2026</a:t>
             </a:fld>
             <a:endParaRPr lang="en-US"/>
           </a:p>
@@ -3091,7 +3091,7 @@
           <a:p>
             <a:fld id="{6383FAE1-13DE-4511-8C1B-C8AFB720664C}" type="datetimeFigureOut">
               <a:rPr lang="en-US" smtClean="0"/>
-              <a:t>4/25/2026</a:t>
+              <a:t>6/10/2026</a:t>
             </a:fld>
             <a:endParaRPr lang="en-US"/>
           </a:p>
@@ -3299,7 +3299,7 @@
           <a:p>
             <a:fld id="{6383FAE1-13DE-4511-8C1B-C8AFB720664C}" type="datetimeFigureOut">
               <a:rPr lang="en-US" smtClean="0"/>
-              <a:t>4/25/2026</a:t>
+              <a:t>6/10/2026</a:t>
             </a:fld>
             <a:endParaRPr lang="en-US"/>
           </a:p>
@@ -3497,7 +3497,7 @@
           <a:p>
             <a:fld id="{6383FAE1-13DE-4511-8C1B-C8AFB720664C}" type="datetimeFigureOut">
               <a:rPr lang="en-US" smtClean="0"/>
-              <a:t>4/25/2026</a:t>
+              <a:t>6/10/2026</a:t>
             </a:fld>
             <a:endParaRPr lang="en-US"/>
           </a:p>
@@ -3772,7 +3772,7 @@
           <a:p>
             <a:fld id="{6383FAE1-13DE-4511-8C1B-C8AFB720664C}" type="datetimeFigureOut">
               <a:rPr lang="en-US" smtClean="0"/>
-              <a:t>4/25/2026</a:t>
+              <a:t>6/10/2026</a:t>
             </a:fld>
             <a:endParaRPr lang="en-US"/>
           </a:p>
@@ -4037,7 +4037,7 @@
           <a:p>
             <a:fld id="{6383FAE1-13DE-4511-8C1B-C8AFB720664C}" type="datetimeFigureOut">
               <a:rPr lang="en-US" smtClean="0"/>
-              <a:t>4/25/2026</a:t>
+              <a:t>6/10/2026</a:t>
             </a:fld>
             <a:endParaRPr lang="en-US"/>
           </a:p>
@@ -4449,7 +4449,7 @@
           <a:p>
             <a:fld id="{6383FAE1-13DE-4511-8C1B-C8AFB720664C}" type="datetimeFigureOut">
               <a:rPr lang="en-US" smtClean="0"/>
-              <a:t>4/25/2026</a:t>
+              <a:t>6/10/2026</a:t>
             </a:fld>
             <a:endParaRPr lang="en-US"/>
           </a:p>
@@ -4590,7 +4590,7 @@
           <a:p>
             <a:fld id="{6383FAE1-13DE-4511-8C1B-C8AFB720664C}" type="datetimeFigureOut">
               <a:rPr lang="en-US" smtClean="0"/>
-              <a:t>4/25/2026</a:t>
+              <a:t>6/10/2026</a:t>
             </a:fld>
             <a:endParaRPr lang="en-US"/>
           </a:p>
@@ -4703,7 +4703,7 @@
           <a:p>
             <a:fld id="{6383FAE1-13DE-4511-8C1B-C8AFB720664C}" type="datetimeFigureOut">
               <a:rPr lang="en-US" smtClean="0"/>
-              <a:t>4/25/2026</a:t>
+              <a:t>6/10/2026</a:t>
             </a:fld>
             <a:endParaRPr lang="en-US"/>
           </a:p>
@@ -5014,7 +5014,7 @@
           <a:p>
             <a:fld id="{6383FAE1-13DE-4511-8C1B-C8AFB720664C}" type="datetimeFigureOut">
               <a:rPr lang="en-US" smtClean="0"/>
-              <a:t>4/25/2026</a:t>
+              <a:t>6/10/2026</a:t>
             </a:fld>
             <a:endParaRPr lang="en-US"/>
           </a:p>
@@ -5305,7 +5305,7 @@
           <a:p>
             <a:fld id="{6383FAE1-13DE-4511-8C1B-C8AFB720664C}" type="datetimeFigureOut">
               <a:rPr lang="en-US" smtClean="0"/>
-              <a:t>4/25/2026</a:t>
+              <a:t>6/10/2026</a:t>
             </a:fld>
             <a:endParaRPr lang="en-US"/>
           </a:p>
@@ -5549,7 +5549,7 @@
           <a:p>
             <a:fld id="{6383FAE1-13DE-4511-8C1B-C8AFB720664C}" type="datetimeFigureOut">
               <a:rPr lang="en-US" smtClean="0"/>
-              <a:t>4/25/2026</a:t>
+              <a:t>6/10/2026</a:t>
             </a:fld>
             <a:endParaRPr lang="en-US"/>
           </a:p>
@@ -15783,7 +15783,62 @@
                   </a:schemeClr>
                 </a:solidFill>
               </a:rPr>
-              <a:t>According to Loxford Academy policies, it is required to remit the outstanding balance within seven (7) days from receipt of this notice, failing which further action may be initiated in accordance with contractual obligations defined by Loxford Agreement 3.6.67</a:t>
+              <a:t>According to </a:t>
+            </a:r>
+            <a:r>
+              <a:rPr lang="en-US" sz="2000" b="1" u="sng" dirty="0">
+                <a:solidFill>
+                  <a:schemeClr val="accent4">
+                    <a:lumMod val="60000"/>
+                    <a:lumOff val="40000"/>
+                  </a:schemeClr>
+                </a:solidFill>
+              </a:rPr>
+              <a:t>Loxford Academy </a:t>
+            </a:r>
+            <a:r>
+              <a:rPr lang="en-US" sz="2000" dirty="0">
+                <a:solidFill>
+                  <a:schemeClr val="accent4">
+                    <a:lumMod val="60000"/>
+                    <a:lumOff val="40000"/>
+                  </a:schemeClr>
+                </a:solidFill>
+              </a:rPr>
+              <a:t>policies, it is required to remit the outstanding balance </a:t>
+            </a:r>
+            <a:r>
+              <a:rPr lang="en-US" sz="2000" b="1" u="sng" dirty="0">
+                <a:solidFill>
+                  <a:schemeClr val="accent4">
+                    <a:lumMod val="60000"/>
+                    <a:lumOff val="40000"/>
+                  </a:schemeClr>
+                </a:solidFill>
+              </a:rPr>
+              <a:t>within seven (7) days </a:t>
+            </a:r>
+            <a:r>
+              <a:rPr lang="en-US" sz="2000" dirty="0">
+                <a:solidFill>
+                  <a:schemeClr val="accent4">
+                    <a:lumMod val="60000"/>
+                    <a:lumOff val="40000"/>
+                  </a:schemeClr>
+                </a:solidFill>
+              </a:rPr>
+              <a:t>from receipt of this notice, failing which further action may be initiated in accordance with contractual obligations defined by </a:t>
+            </a:r>
+            <a:r>
+              <a:rPr lang="en-US" sz="2000" b="1" u="sng" dirty="0">
+                <a:solidFill>
+                  <a:schemeClr val="accent4">
+                    <a:lumMod val="60000"/>
+                    <a:lumOff val="40000"/>
+                  </a:schemeClr>
+                </a:solidFill>
+              </a:rPr>
+              <a:t>Loxford Agreement 3.6.67</a:t>
             </a:r>
           </a:p>
           <a:p>
@@ -16547,7 +16602,7 @@
         </p:nvSpPr>
         <p:spPr>
           <a:xfrm>
-            <a:off x="148336" y="199104"/>
+            <a:off x="301244" y="107664"/>
             <a:ext cx="10292080" cy="830997"/>
           </a:xfrm>
           <a:prstGeom prst="rect">
@@ -16624,8 +16679,8 @@
         </p:nvSpPr>
         <p:spPr>
           <a:xfrm>
-            <a:off x="205740" y="1204990"/>
-            <a:ext cx="5298948" cy="3170099"/>
+            <a:off x="148336" y="1167040"/>
+            <a:ext cx="5298948" cy="4093428"/>
           </a:xfrm>
           <a:prstGeom prst="rect">
             <a:avLst/>
@@ -16654,6 +16709,22 @@
             <a:pPr>
               <a:buNone/>
             </a:pPr>
+            <a:r>
+              <a:rPr lang="en-US" sz="2000" b="1" dirty="0">
+                <a:solidFill>
+                  <a:schemeClr val="accent6">
+                    <a:lumMod val="60000"/>
+                    <a:lumOff val="40000"/>
+                  </a:schemeClr>
+                </a:solidFill>
+              </a:rPr>
+              <a:t>Response:</a:t>
+            </a:r>
+          </a:p>
+          <a:p>
+            <a:pPr>
+              <a:buNone/>
+            </a:pPr>
             <a:endParaRPr lang="en-US" sz="2000" b="1" dirty="0">
               <a:solidFill>
                 <a:schemeClr val="accent6">
@@ -16678,6 +16749,32 @@
               </a:rPr>
               <a:t>The patient was admitted for stomach pain. They got better and are going home with medicines.</a:t>
             </a:r>
+          </a:p>
+          <a:p>
+            <a:pPr>
+              <a:buNone/>
+            </a:pPr>
+            <a:endParaRPr lang="en-US" sz="2000" dirty="0">
+              <a:solidFill>
+                <a:schemeClr val="accent6">
+                  <a:lumMod val="60000"/>
+                  <a:lumOff val="40000"/>
+                </a:schemeClr>
+              </a:solidFill>
+            </a:endParaRPr>
+          </a:p>
+          <a:p>
+            <a:pPr>
+              <a:buNone/>
+            </a:pPr>
+            <a:endParaRPr lang="en-US" sz="2000" dirty="0">
+              <a:solidFill>
+                <a:schemeClr val="accent6">
+                  <a:lumMod val="60000"/>
+                  <a:lumOff val="40000"/>
+                </a:schemeClr>
+              </a:solidFill>
+            </a:endParaRPr>
           </a:p>
           <a:p>
             <a:pPr>
@@ -16825,14 +16922,17 @@
             <a:pPr>
               <a:buNone/>
             </a:pPr>
-            <a:endParaRPr lang="en-US" b="1" dirty="0">
-              <a:solidFill>
-                <a:schemeClr val="accent6">
-                  <a:lumMod val="60000"/>
-                  <a:lumOff val="40000"/>
-                </a:schemeClr>
-              </a:solidFill>
-            </a:endParaRPr>
+            <a:r>
+              <a:rPr lang="en-US" b="1" dirty="0">
+                <a:solidFill>
+                  <a:schemeClr val="accent6">
+                    <a:lumMod val="60000"/>
+                    <a:lumOff val="40000"/>
+                  </a:schemeClr>
+                </a:solidFill>
+              </a:rPr>
+              <a:t>Response: </a:t>
+            </a:r>
           </a:p>
           <a:p>
             <a:pPr>
@@ -17263,7 +17363,7 @@
         <p:spPr>
           <a:xfrm>
             <a:off x="148336" y="2283680"/>
-            <a:ext cx="4082796" cy="1015663"/>
+            <a:ext cx="4082796" cy="1323439"/>
           </a:xfrm>
           <a:prstGeom prst="rect">
             <a:avLst/>
@@ -17282,7 +17382,7 @@
             <a:r>
               <a:rPr lang="en-US" sz="2000" b="1" u="sng" dirty="0">
                 <a:solidFill>
-                  <a:schemeClr val="accent4">
+                  <a:schemeClr val="accent6">
                     <a:lumMod val="60000"/>
                     <a:lumOff val="40000"/>
                   </a:schemeClr>
@@ -17317,7 +17417,7 @@
                   </a:schemeClr>
                 </a:solidFill>
               </a:rPr>
-              <a:t>Michael bought 6 bananas for $12</a:t>
+              <a:t>Michael bought 6 bananas for $12. He loves eating banana.</a:t>
             </a:r>
           </a:p>
         </p:txBody>
@@ -17336,7 +17436,7 @@
         </p:nvSpPr>
         <p:spPr>
           <a:xfrm>
-            <a:off x="6396228" y="2178827"/>
+            <a:off x="7822692" y="2178827"/>
             <a:ext cx="2926080" cy="2031325"/>
           </a:xfrm>
           <a:prstGeom prst="rect">
@@ -17475,7 +17575,7 @@
         <p:spPr>
           <a:xfrm>
             <a:off x="75184" y="4609464"/>
-            <a:ext cx="4844288" cy="1015663"/>
+            <a:ext cx="4844288" cy="1323439"/>
           </a:xfrm>
           <a:prstGeom prst="rect">
             <a:avLst/>
@@ -17491,7 +17591,7 @@
             <a:r>
               <a:rPr lang="en-US" sz="2000" b="1" u="sng" dirty="0">
                 <a:solidFill>
-                  <a:schemeClr val="accent4">
+                  <a:schemeClr val="accent6">
                     <a:lumMod val="60000"/>
                     <a:lumOff val="40000"/>
                   </a:schemeClr>
@@ -17526,7 +17626,7 @@
                   </a:schemeClr>
                 </a:solidFill>
               </a:rPr>
-              <a:t>James bought 2 pen and  it cost him  for $4</a:t>
+              <a:t>James bought 2 pen and  it cost him for $4. He bought the pen  on this Sunday</a:t>
             </a:r>
           </a:p>
         </p:txBody>
@@ -17545,7 +17645,7 @@
         </p:nvSpPr>
         <p:spPr>
           <a:xfrm>
-            <a:off x="6396228" y="4444646"/>
+            <a:off x="7822692" y="4444646"/>
             <a:ext cx="2926080" cy="2031325"/>
           </a:xfrm>
           <a:prstGeom prst="rect">
@@ -17683,8 +17783,8 @@
         </p:nvSpPr>
         <p:spPr>
           <a:xfrm>
-            <a:off x="3628646" y="1270160"/>
-            <a:ext cx="3003804" cy="563756"/>
+            <a:off x="4869179" y="2938273"/>
+            <a:ext cx="2453641" cy="1523020"/>
           </a:xfrm>
           <a:prstGeom prst="ellipse">
             <a:avLst/>
@@ -17846,7 +17946,7 @@
         <p:spPr>
           <a:xfrm>
             <a:off x="123444" y="1862251"/>
-            <a:ext cx="3753612" cy="1015663"/>
+            <a:ext cx="3753612" cy="1323439"/>
           </a:xfrm>
           <a:prstGeom prst="rect">
             <a:avLst/>
@@ -17872,6 +17972,22 @@
                 </a:solidFill>
               </a:rPr>
               <a:t>Generic Base Model</a:t>
+            </a:r>
+          </a:p>
+          <a:p>
+            <a:pPr>
+              <a:buNone/>
+            </a:pPr>
+            <a:r>
+              <a:rPr lang="en-US" sz="2000" b="1" dirty="0">
+                <a:solidFill>
+                  <a:schemeClr val="accent6">
+                    <a:lumMod val="60000"/>
+                    <a:lumOff val="40000"/>
+                  </a:schemeClr>
+                </a:solidFill>
+              </a:rPr>
+              <a:t>Response to customer query -&gt;</a:t>
             </a:r>
           </a:p>
           <a:p>
@@ -19620,6 +19736,223 @@
           </mc:Fallback>
         </mc:AlternateContent>
       </p:grpSp>
+      <p:sp>
+        <p:nvSpPr>
+          <p:cNvPr id="2" name="TextBox 1">
+            <a:extLst>
+              <a:ext uri="{FF2B5EF4-FFF2-40B4-BE49-F238E27FC236}">
+                <a16:creationId xmlns:a16="http://schemas.microsoft.com/office/drawing/2014/main" id="{C73FB28A-C9F9-2018-94D7-90767BF3CE06}"/>
+              </a:ext>
+            </a:extLst>
+          </p:cNvPr>
+          <p:cNvSpPr txBox="1"/>
+          <p:nvPr/>
+        </p:nvSpPr>
+        <p:spPr>
+          <a:xfrm>
+            <a:off x="1170432" y="3959352"/>
+            <a:ext cx="2445541" cy="369332"/>
+          </a:xfrm>
+          <a:prstGeom prst="rect">
+            <a:avLst/>
+          </a:prstGeom>
+          <a:noFill/>
+        </p:spPr>
+        <p:txBody>
+          <a:bodyPr wrap="none" rtlCol="0">
+            <a:spAutoFit/>
+          </a:bodyPr>
+          <a:lstStyle/>
+          <a:p>
+            <a:r>
+              <a:rPr lang="en-US" dirty="0">
+                <a:solidFill>
+                  <a:schemeClr val="accent6">
+                    <a:lumMod val="60000"/>
+                    <a:lumOff val="40000"/>
+                  </a:schemeClr>
+                </a:solidFill>
+              </a:rPr>
+              <a:t>The product arrived late</a:t>
+            </a:r>
+          </a:p>
+        </p:txBody>
+      </p:sp>
+      <p:sp>
+        <p:nvSpPr>
+          <p:cNvPr id="3" name="TextBox 2">
+            <a:extLst>
+              <a:ext uri="{FF2B5EF4-FFF2-40B4-BE49-F238E27FC236}">
+                <a16:creationId xmlns:a16="http://schemas.microsoft.com/office/drawing/2014/main" id="{85524B32-6E64-5285-7C59-5748AAB5F4F0}"/>
+              </a:ext>
+            </a:extLst>
+          </p:cNvPr>
+          <p:cNvSpPr txBox="1"/>
+          <p:nvPr/>
+        </p:nvSpPr>
+        <p:spPr>
+          <a:xfrm>
+            <a:off x="8298419" y="3959352"/>
+            <a:ext cx="2577372" cy="369332"/>
+          </a:xfrm>
+          <a:prstGeom prst="rect">
+            <a:avLst/>
+          </a:prstGeom>
+          <a:noFill/>
+        </p:spPr>
+        <p:txBody>
+          <a:bodyPr wrap="none" rtlCol="0">
+            <a:spAutoFit/>
+          </a:bodyPr>
+          <a:lstStyle/>
+          <a:p>
+            <a:r>
+              <a:rPr lang="en-US" dirty="0">
+                <a:solidFill>
+                  <a:schemeClr val="accent6">
+                    <a:lumMod val="60000"/>
+                    <a:lumOff val="40000"/>
+                  </a:schemeClr>
+                </a:solidFill>
+              </a:rPr>
+              <a:t>{“sentiment”: “negative”}</a:t>
+            </a:r>
+          </a:p>
+        </p:txBody>
+      </p:sp>
+      <p:sp>
+        <p:nvSpPr>
+          <p:cNvPr id="4" name="TextBox 3">
+            <a:extLst>
+              <a:ext uri="{FF2B5EF4-FFF2-40B4-BE49-F238E27FC236}">
+                <a16:creationId xmlns:a16="http://schemas.microsoft.com/office/drawing/2014/main" id="{84786024-AC2D-DE92-45E5-3C2419DB2B84}"/>
+              </a:ext>
+            </a:extLst>
+          </p:cNvPr>
+          <p:cNvSpPr txBox="1"/>
+          <p:nvPr/>
+        </p:nvSpPr>
+        <p:spPr>
+          <a:xfrm>
+            <a:off x="988549" y="4995088"/>
+            <a:ext cx="3032561" cy="369332"/>
+          </a:xfrm>
+          <a:prstGeom prst="rect">
+            <a:avLst/>
+          </a:prstGeom>
+          <a:noFill/>
+        </p:spPr>
+        <p:txBody>
+          <a:bodyPr wrap="none" rtlCol="0">
+            <a:spAutoFit/>
+          </a:bodyPr>
+          <a:lstStyle/>
+          <a:p>
+            <a:r>
+              <a:rPr lang="en-US" dirty="0">
+                <a:solidFill>
+                  <a:schemeClr val="accent6">
+                    <a:lumMod val="60000"/>
+                    <a:lumOff val="40000"/>
+                  </a:schemeClr>
+                </a:solidFill>
+              </a:rPr>
+              <a:t>The product is  working great</a:t>
+            </a:r>
+          </a:p>
+        </p:txBody>
+      </p:sp>
+      <p:sp>
+        <p:nvSpPr>
+          <p:cNvPr id="5" name="TextBox 4">
+            <a:extLst>
+              <a:ext uri="{FF2B5EF4-FFF2-40B4-BE49-F238E27FC236}">
+                <a16:creationId xmlns:a16="http://schemas.microsoft.com/office/drawing/2014/main" id="{5EF7B6D3-BF7C-9B46-A330-A8FAE0FA7DB2}"/>
+              </a:ext>
+            </a:extLst>
+          </p:cNvPr>
+          <p:cNvSpPr txBox="1"/>
+          <p:nvPr/>
+        </p:nvSpPr>
+        <p:spPr>
+          <a:xfrm>
+            <a:off x="8445720" y="4989284"/>
+            <a:ext cx="2516458" cy="369332"/>
+          </a:xfrm>
+          <a:prstGeom prst="rect">
+            <a:avLst/>
+          </a:prstGeom>
+          <a:noFill/>
+        </p:spPr>
+        <p:txBody>
+          <a:bodyPr wrap="none" rtlCol="0">
+            <a:spAutoFit/>
+          </a:bodyPr>
+          <a:lstStyle/>
+          <a:p>
+            <a:r>
+              <a:rPr lang="en-US" dirty="0">
+                <a:solidFill>
+                  <a:schemeClr val="accent6">
+                    <a:lumMod val="60000"/>
+                    <a:lumOff val="40000"/>
+                  </a:schemeClr>
+                </a:solidFill>
+              </a:rPr>
+              <a:t>{“sentiment”: “positive”}</a:t>
+            </a:r>
+          </a:p>
+        </p:txBody>
+      </p:sp>
+      <p:sp>
+        <p:nvSpPr>
+          <p:cNvPr id="12" name="Oval 11">
+            <a:extLst>
+              <a:ext uri="{FF2B5EF4-FFF2-40B4-BE49-F238E27FC236}">
+                <a16:creationId xmlns:a16="http://schemas.microsoft.com/office/drawing/2014/main" id="{C436F4B5-6C84-F55B-F3E4-C80D8AA85E04}"/>
+              </a:ext>
+            </a:extLst>
+          </p:cNvPr>
+          <p:cNvSpPr/>
+          <p:nvPr/>
+        </p:nvSpPr>
+        <p:spPr>
+          <a:xfrm>
+            <a:off x="4594098" y="4328684"/>
+            <a:ext cx="3003804" cy="563756"/>
+          </a:xfrm>
+          <a:prstGeom prst="ellipse">
+            <a:avLst/>
+          </a:prstGeom>
+        </p:spPr>
+        <p:style>
+          <a:lnRef idx="2">
+            <a:schemeClr val="accent1">
+              <a:shade val="15000"/>
+            </a:schemeClr>
+          </a:lnRef>
+          <a:fillRef idx="1">
+            <a:schemeClr val="accent1"/>
+          </a:fillRef>
+          <a:effectRef idx="0">
+            <a:schemeClr val="accent1"/>
+          </a:effectRef>
+          <a:fontRef idx="minor">
+            <a:schemeClr val="lt1"/>
+          </a:fontRef>
+        </p:style>
+        <p:txBody>
+          <a:bodyPr rtlCol="0" anchor="ctr"/>
+          <a:lstStyle/>
+          <a:p>
+            <a:pPr algn="ctr"/>
+            <a:r>
+              <a:rPr lang="en-US" dirty="0"/>
+              <a:t>Fine Tuned Model</a:t>
+            </a:r>
+          </a:p>
+        </p:txBody>
+      </p:sp>
     </p:spTree>
     <p:extLst>
       <p:ext uri="{BB962C8B-B14F-4D97-AF65-F5344CB8AC3E}">
